--- a/companies/calderwood-partners/Engagements/Poole, Mcknight and Rush/2010.06.14 - Briefing Deck - Poole, Mcknight and Rush.pptx
+++ b/companies/calderwood-partners/Engagements/Poole, Mcknight and Rush/2010.06.14 - Briefing Deck - Poole, Mcknight and Rush.pptx
@@ -3139,27 +3139,9 @@
             </a:r>
           </a:p>
           <a:p>
-            <a:pPr lvl="1"/>
-            <a:r>
-              <a:t>A progress briefing for Sandra Flores, Chief Operating Officer</a:t>
-            </a:r>
-          </a:p>
-          <a:p>
-            <a:pPr lvl="1"/>
-            <a:r>
-              <a:t>Engagement commenced May 18, 2010</a:t>
-            </a:r>
-          </a:p>
-          <a:p>
-            <a:pPr lvl="1"/>
-            <a:r>
-              <a:t>Prepared by the engagement team; presented by Deborah Gordon</a:t>
-            </a:r>
-          </a:p>
-          <a:p>
-            <a:pPr lvl="1"/>
-            <a:r>
-              <a:t>Early in the work: the baseline is under construction and there are no findings yet</a:t>
+            <a:pPr/>
+            <a:r>
+              <a:t>A briefing for the client sponsor on the opening phase of the review. The engagement began on May 18, 2010 and is scoped to run about four months; this deck covers where the work stands in its early weeks.</a:t>
             </a:r>
           </a:p>
         </p:txBody>
@@ -3203,7 +3185,7 @@
                   <a:srgbClr val="4A2E2A"/>
                 </a:solidFill>
               </a:rPr>
-              <a:t>What You Asked Us To Review</a:t>
+              <a:t>What we set out to answer</a:t>
             </a:r>
           </a:p>
         </p:txBody>
@@ -3225,31 +3207,19 @@
           <a:p>
             <a:pPr lvl="1"/>
             <a:r>
-              <a:t>Where the supply chain costs more than it should, end to end</a:t>
+              <a:t>Where the supply chain of Poole, Mcknight and Rush earns its keep today, and where it costs more than it returns.</a:t>
             </a:r>
           </a:p>
           <a:p>
             <a:pPr lvl="1"/>
             <a:r>
-              <a:t>Purchasing, inbound freight, warehousing, inventory, and order fulfillment</a:t>
+              <a:t>How cost, service levels, and inventory compare with a well-run operation of similar size.</a:t>
             </a:r>
           </a:p>
           <a:p>
             <a:pPr lvl="1"/>
             <a:r>
-              <a:t>A baseline of how cost and goods move today, built from your own records</a:t>
-            </a:r>
-          </a:p>
-          <a:p>
-            <a:pPr lvl="1"/>
-            <a:r>
-              <a:t>The buffers, the expedited freight, and the handling that carry avoidable cost</a:t>
-            </a:r>
-          </a:p>
-          <a:p>
-            <a:pPr lvl="1"/>
-            <a:r>
-              <a:t>Recommendations that are sized and sequenced, not a wish list</a:t>
+              <a:t>Which improvements are worth pursuing, and what each would ask of the organization.</a:t>
             </a:r>
           </a:p>
         </p:txBody>
@@ -3293,7 +3263,7 @@
                   <a:srgbClr val="4A2E2A"/>
                 </a:solidFill>
               </a:rPr>
-              <a:t>How We Are Working</a:t>
+              <a:t>Where the work stands</a:t>
             </a:r>
           </a:p>
         </p:txBody>
@@ -3315,31 +3285,19 @@
           <a:p>
             <a:pPr lvl="1"/>
             <a:r>
-              <a:t>We start from your purchasing, inventory, and freight data, not a template</a:t>
+              <a:t>We are in the opening phase: building a faithful picture of the supply chain as it runs today.</a:t>
             </a:r>
           </a:p>
           <a:p>
             <a:pPr lvl="1"/>
             <a:r>
-              <a:t>Daniel Leach is assembling and reconciling the operating data</a:t>
+              <a:t>The flow from supplier to point of use is being traced end to end.</a:t>
             </a:r>
           </a:p>
           <a:p>
             <a:pPr lvl="1"/>
             <a:r>
-              <a:t>Michael Walker is arranging the site visits and the interviews</a:t>
-            </a:r>
-          </a:p>
-          <a:p>
-            <a:pPr lvl="1"/>
-            <a:r>
-              <a:t>Two or three sites at Poole, Mcknight and Rush walked, with purchasing and warehouse staff</a:t>
-            </a:r>
-          </a:p>
-          <a:p>
-            <a:pPr lvl="1"/>
-            <a:r>
-              <a:t>Every figure we show you will tie back to one your team already recognizes</a:t>
+              <a:t>First data requests are out to the client team, and the cost and inventory picture is being assembled behind them.</a:t>
             </a:r>
           </a:p>
         </p:txBody>
@@ -3383,7 +3341,7 @@
                   <a:srgbClr val="4A2E2A"/>
                 </a:solidFill>
               </a:rPr>
-              <a:t>What We Are Seeing So Far</a:t>
+              <a:t>What the baseline is beginning to show</a:t>
             </a:r>
           </a:p>
         </p:txBody>
@@ -3405,25 +3363,19 @@
           <a:p>
             <a:pPr lvl="1"/>
             <a:r>
-              <a:t>Inventory sits longer in two of the regional warehouses than the service level needs</a:t>
+              <a:t>The documented process and the process as actually run differ in a few predictable places.</a:t>
             </a:r>
           </a:p>
           <a:p>
             <a:pPr lvl="1"/>
             <a:r>
-              <a:t>A sizable share of inbound freight is moving on expedited terms to recover lost time</a:t>
+              <a:t>Inventory is carried unevenly across the network, and some of it buys less protection than its cost suggests.</a:t>
             </a:r>
           </a:p>
           <a:p>
             <a:pPr lvl="1"/>
             <a:r>
-              <a:t>Safety stock looks set by habit in several categories rather than by demand</a:t>
-            </a:r>
-          </a:p>
-          <a:p>
-            <a:pPr lvl="1"/>
-            <a:r>
-              <a:t>These are observations from the data so far, not findings, and none is sized yet</a:t>
+              <a:t>A few figures still rest on data we are verifying; we mark those plainly rather than lean on them.</a:t>
             </a:r>
           </a:p>
         </p:txBody>
@@ -3467,7 +3419,7 @@
                   <a:srgbClr val="4A2E2A"/>
                 </a:solidFill>
               </a:rPr>
-              <a:t>Where the Work Stands</a:t>
+              <a:t>Your team</a:t>
             </a:r>
           </a:p>
         </p:txBody>
@@ -3489,31 +3441,25 @@
           <a:p>
             <a:pPr lvl="1"/>
             <a:r>
-              <a:t>Purchasing and inventory data received and being reconciled</a:t>
+              <a:t>Michael Walker, Engagement Manager, runs the work day to day and holds the relationship.</a:t>
             </a:r>
           </a:p>
           <a:p>
             <a:pPr lvl="1"/>
             <a:r>
-              <a:t>Freight and warehouse cost baseline under construction</a:t>
+              <a:t>Deborah Gordon, Associate, leads the benchmarking and the cost and inventory analysis.</a:t>
             </a:r>
           </a:p>
           <a:p>
             <a:pPr lvl="1"/>
             <a:r>
-              <a:t>First site visits scheduled and the interviews beginning</a:t>
+              <a:t>Daniel Leach, Research Associate, assembles and verifies the underlying data.</a:t>
             </a:r>
           </a:p>
           <a:p>
             <a:pPr lvl="1"/>
             <a:r>
-              <a:t>Roughly a quarter of the way through a review planned for about four months</a:t>
-            </a:r>
-          </a:p>
-          <a:p>
-            <a:pPr lvl="1"/>
-            <a:r>
-              <a:t>No target design is on the table, and none should be read into this briefing</a:t>
+              <a:t>Sandra Flores, Chief Operating Officer, is our sponsor on the client side.</a:t>
             </a:r>
           </a:p>
         </p:txBody>
@@ -3557,7 +3503,7 @@
                   <a:srgbClr val="4A2E2A"/>
                 </a:solidFill>
               </a:rPr>
-              <a:t>What Comes Next</a:t>
+              <a:t>What happens next</a:t>
             </a:r>
           </a:p>
         </p:txBody>
@@ -3579,25 +3525,19 @@
           <a:p>
             <a:pPr lvl="1"/>
             <a:r>
-              <a:t>Close the baseline and confirm it against your management accounts</a:t>
+              <a:t>Close out the baseline and the benchmark over the coming weeks.</a:t>
             </a:r>
           </a:p>
           <a:p>
             <a:pPr lvl="1"/>
             <a:r>
-              <a:t>Walk the remaining sites and finish the first round of interviews</a:t>
+              <a:t>Frame the handful of improvements the analysis supports, each with its cost and its likely return.</a:t>
             </a:r>
           </a:p>
           <a:p>
             <a:pPr lvl="1"/>
             <a:r>
-              <a:t>Frame the cost drivers for discussion at the next working session</a:t>
-            </a:r>
-          </a:p>
-          <a:p>
-            <a:pPr lvl="1"/>
-            <a:r>
-              <a:t>Questions to Deborah Gordon; data questions direct to Daniel Leach</a:t>
+              <a:t>Return to you with those options before any direction is fixed.</a:t>
             </a:r>
           </a:p>
         </p:txBody>
